--- a/ppt/MH_Grade10/MH10_S71_Space_Missions.pptx
+++ b/ppt/MH_Grade10/MH10_S71_Space_Missions.pptx
@@ -10580,8 +10580,8 @@
         </p:nvSpPr>
         <p:spPr>
           <a:xfrm>
-            <a:off x="1143000" y="2057400"/>
-            <a:ext cx="5029200" cy="411480"/>
+            <a:off x="1188720" y="2103120"/>
+            <a:ext cx="5029200" cy="457200"/>
           </a:xfrm>
           <a:prstGeom prst="rect">
             <a:avLst/>
@@ -10615,8 +10615,8 @@
         </p:nvSpPr>
         <p:spPr>
           <a:xfrm>
-            <a:off x="1143000" y="2606040"/>
-            <a:ext cx="5074920" cy="3063240"/>
+            <a:off x="1188720" y="2697480"/>
+            <a:ext cx="5029200" cy="3108959"/>
           </a:xfrm>
           <a:prstGeom prst="rect">
             <a:avLst/>
@@ -10631,14 +10631,14 @@
           <a:p>
             <a:pPr algn="l">
               <a:lnSpc>
-                <a:spcPct val="105000"/>
+                <a:spcPct val="106000"/>
               </a:lnSpc>
               <a:spcAft>
                 <a:spcPts val="900"/>
               </a:spcAft>
             </a:pPr>
             <a:r>
-              <a:rPr sz="1500" b="1" i="0">
+              <a:rPr sz="1300" b="1" i="0">
                 <a:solidFill>
                   <a:srgbClr val="6A4C93"/>
                 </a:solidFill>
@@ -10647,7 +10647,7 @@
               <a:t>•  </a:t>
             </a:r>
             <a:r>
-              <a:rPr sz="1500" b="0" i="0">
+              <a:rPr sz="1300" b="0" i="0">
                 <a:solidFill>
                   <a:srgbClr val="1D2433"/>
                 </a:solidFill>
@@ -10659,14 +10659,14 @@
           <a:p>
             <a:pPr algn="l">
               <a:lnSpc>
-                <a:spcPct val="105000"/>
+                <a:spcPct val="106000"/>
               </a:lnSpc>
               <a:spcAft>
                 <a:spcPts val="900"/>
               </a:spcAft>
             </a:pPr>
             <a:r>
-              <a:rPr sz="1500" b="1" i="0">
+              <a:rPr sz="1300" b="1" i="0">
                 <a:solidFill>
                   <a:srgbClr val="6A4C93"/>
                 </a:solidFill>
@@ -10675,7 +10675,7 @@
               <a:t>•  </a:t>
             </a:r>
             <a:r>
-              <a:rPr sz="1500" b="0" i="0">
+              <a:rPr sz="1300" b="0" i="0">
                 <a:solidFill>
                   <a:srgbClr val="1D2433"/>
                 </a:solidFill>
@@ -10687,14 +10687,14 @@
           <a:p>
             <a:pPr algn="l">
               <a:lnSpc>
-                <a:spcPct val="105000"/>
+                <a:spcPct val="106000"/>
               </a:lnSpc>
               <a:spcAft>
                 <a:spcPts val="900"/>
               </a:spcAft>
             </a:pPr>
             <a:r>
-              <a:rPr sz="1500" b="1" i="0">
+              <a:rPr sz="1300" b="1" i="0">
                 <a:solidFill>
                   <a:srgbClr val="6A4C93"/>
                 </a:solidFill>
@@ -10703,7 +10703,7 @@
               <a:t>•  </a:t>
             </a:r>
             <a:r>
-              <a:rPr sz="1500" b="0" i="0">
+              <a:rPr sz="1300" b="0" i="0">
                 <a:solidFill>
                   <a:srgbClr val="1D2433"/>
                 </a:solidFill>
@@ -10715,14 +10715,14 @@
           <a:p>
             <a:pPr algn="l">
               <a:lnSpc>
-                <a:spcPct val="105000"/>
+                <a:spcPct val="106000"/>
               </a:lnSpc>
               <a:spcAft>
                 <a:spcPts val="900"/>
               </a:spcAft>
             </a:pPr>
             <a:r>
-              <a:rPr sz="1500" b="1" i="0">
+              <a:rPr sz="1300" b="1" i="0">
                 <a:solidFill>
                   <a:srgbClr val="6A4C93"/>
                 </a:solidFill>
@@ -10731,7 +10731,7 @@
               <a:t>•  </a:t>
             </a:r>
             <a:r>
-              <a:rPr sz="1500" b="0" i="0">
+              <a:rPr sz="1300" b="0" i="0">
                 <a:solidFill>
                   <a:srgbClr val="1D2433"/>
                 </a:solidFill>
@@ -11886,7 +11886,7 @@
         </p:nvSpPr>
         <p:spPr>
           <a:xfrm>
-            <a:off x="640080" y="1828800"/>
+            <a:off x="640080" y="1874519"/>
             <a:ext cx="10881360" cy="4114800"/>
           </a:xfrm>
           <a:prstGeom prst="roundRect">
@@ -11932,165 +11932,422 @@
       </p:sp>
       <p:sp>
         <p:nvSpPr>
-          <p:cNvPr id="7" name="TextBox 6"/>
+          <p:cNvPr id="7" name="Rounded Rectangle 6"/>
+          <p:cNvSpPr/>
+          <p:nvPr/>
+        </p:nvSpPr>
+        <p:spPr>
+          <a:xfrm>
+            <a:off x="1051560" y="2381097"/>
+            <a:ext cx="100584" cy="545668"/>
+          </a:xfrm>
+          <a:prstGeom prst="roundRect">
+            <a:avLst>
+              <a:gd name="adj" fmla="val 50000"/>
+            </a:avLst>
+          </a:prstGeom>
+          <a:solidFill>
+            <a:srgbClr val="0A9396"/>
+          </a:solidFill>
+          <a:ln>
+            <a:noFill/>
+          </a:ln>
+          <a:effectLst/>
+        </p:spPr>
+        <p:style>
+          <a:lnRef idx="1">
+            <a:schemeClr val="accent1"/>
+          </a:lnRef>
+          <a:fillRef idx="3">
+            <a:schemeClr val="accent1"/>
+          </a:fillRef>
+          <a:effectRef idx="2">
+            <a:schemeClr val="accent1"/>
+          </a:effectRef>
+          <a:fontRef idx="minor">
+            <a:schemeClr val="lt1"/>
+          </a:fontRef>
+        </p:style>
+        <p:txBody>
+          <a:bodyPr rtlCol="0" anchor="ctr"/>
+          <a:lstStyle/>
+          <a:p>
+            <a:pPr algn="ctr"/>
+          </a:p>
+        </p:txBody>
+      </p:sp>
+      <p:sp>
+        <p:nvSpPr>
+          <p:cNvPr id="8" name="TextBox 7"/>
           <p:cNvSpPr txBox="1"/>
           <p:nvPr/>
         </p:nvSpPr>
         <p:spPr>
           <a:xfrm>
-            <a:off x="1005840" y="2103120"/>
-            <a:ext cx="10058400" cy="3657600"/>
-          </a:xfrm>
-          <a:prstGeom prst="rect">
-            <a:avLst/>
-          </a:prstGeom>
-          <a:noFill/>
-        </p:spPr>
-        <p:txBody>
-          <a:bodyPr wrap="square" anchor="t" lIns="0" rIns="0" tIns="0" bIns="0">
+            <a:off x="1371600" y="2240279"/>
+            <a:ext cx="9784080" cy="880109"/>
+          </a:xfrm>
+          <a:prstGeom prst="rect">
+            <a:avLst/>
+          </a:prstGeom>
+          <a:noFill/>
+        </p:spPr>
+        <p:txBody>
+          <a:bodyPr wrap="square" anchor="ctr" lIns="0" rIns="0" tIns="0" bIns="0">
             <a:spAutoFit/>
           </a:bodyPr>
           <a:lstStyle/>
           <a:p>
             <a:pPr algn="l">
               <a:lnSpc>
-                <a:spcPct val="105000"/>
+                <a:spcPct val="102000"/>
               </a:lnSpc>
               <a:spcAft>
-                <a:spcPts val="1100"/>
+                <a:spcPts val="300"/>
               </a:spcAft>
             </a:pPr>
             <a:r>
-              <a:rPr sz="1600" b="1" i="0">
-                <a:solidFill>
-                  <a:srgbClr val="6A4C93"/>
+              <a:rPr sz="1700" b="1" i="0">
+                <a:solidFill>
+                  <a:srgbClr val="1D2433"/>
                 </a:solidFill>
                 <a:latin typeface="Calibri"/>
               </a:rPr>
-              <a:t>•  </a:t>
-            </a:r>
-            <a:r>
-              <a:rPr sz="1600" b="1" i="0">
-                <a:solidFill>
-                  <a:srgbClr val="1D2433"/>
-                </a:solidFill>
-                <a:latin typeface="Calibri"/>
-              </a:rPr>
-              <a:t>What it is  </a:t>
-            </a:r>
-            <a:r>
-              <a:rPr sz="1500" b="0" i="0">
-                <a:solidFill>
-                  <a:srgbClr val="6B7280"/>
-                </a:solidFill>
-                <a:latin typeface="Calibri"/>
-              </a:rPr>
-              <a:t>Space debris is the collection of non-working man-made objects orbiting the Earth — spent rocket stages, dead satellites and fragments from collisions.</a:t>
+              <a:t>What it is</a:t>
             </a:r>
           </a:p>
           <a:p>
             <a:pPr algn="l">
               <a:lnSpc>
-                <a:spcPct val="105000"/>
+                <a:spcPct val="102000"/>
               </a:lnSpc>
               <a:spcAft>
-                <a:spcPts val="1100"/>
+                <a:spcPts val="300"/>
               </a:spcAft>
             </a:pPr>
             <a:r>
-              <a:rPr sz="1600" b="1" i="0">
-                <a:solidFill>
-                  <a:srgbClr val="6A4C93"/>
+              <a:rPr sz="1350" b="0" i="0">
+                <a:solidFill>
+                  <a:srgbClr val="6B7280"/>
                 </a:solidFill>
                 <a:latin typeface="Calibri"/>
               </a:rPr>
-              <a:t>•  </a:t>
-            </a:r>
-            <a:r>
-              <a:rPr sz="1600" b="1" i="0">
-                <a:solidFill>
-                  <a:srgbClr val="1D2433"/>
-                </a:solidFill>
-                <a:latin typeface="Calibri"/>
-              </a:rPr>
-              <a:t>Why it is dangerous  </a:t>
-            </a:r>
-            <a:r>
-              <a:rPr sz="1500" b="0" i="0">
-                <a:solidFill>
-                  <a:srgbClr val="6B7280"/>
-                </a:solidFill>
-                <a:latin typeface="Calibri"/>
-              </a:rPr>
-              <a:t>Debris travels at very high speed, so even a small piece can seriously damage or destroy a working satellite or spacecraft it strikes.</a:t>
-            </a:r>
-          </a:p>
+              <a:t>Space debris is the collection of non-working man-made objects orbiting the Earth — spent rocket stages, dead satellites and fragments from collisions.</a:t>
+            </a:r>
+          </a:p>
+        </p:txBody>
+      </p:sp>
+      <p:sp>
+        <p:nvSpPr>
+          <p:cNvPr id="9" name="Rounded Rectangle 8"/>
+          <p:cNvSpPr/>
+          <p:nvPr/>
+        </p:nvSpPr>
+        <p:spPr>
+          <a:xfrm>
+            <a:off x="1051560" y="3261207"/>
+            <a:ext cx="100584" cy="545668"/>
+          </a:xfrm>
+          <a:prstGeom prst="roundRect">
+            <a:avLst>
+              <a:gd name="adj" fmla="val 50000"/>
+            </a:avLst>
+          </a:prstGeom>
+          <a:solidFill>
+            <a:srgbClr val="F4801A"/>
+          </a:solidFill>
+          <a:ln>
+            <a:noFill/>
+          </a:ln>
+          <a:effectLst/>
+        </p:spPr>
+        <p:style>
+          <a:lnRef idx="1">
+            <a:schemeClr val="accent1"/>
+          </a:lnRef>
+          <a:fillRef idx="3">
+            <a:schemeClr val="accent1"/>
+          </a:fillRef>
+          <a:effectRef idx="2">
+            <a:schemeClr val="accent1"/>
+          </a:effectRef>
+          <a:fontRef idx="minor">
+            <a:schemeClr val="lt1"/>
+          </a:fontRef>
+        </p:style>
+        <p:txBody>
+          <a:bodyPr rtlCol="0" anchor="ctr"/>
+          <a:lstStyle/>
+          <a:p>
+            <a:pPr algn="ctr"/>
+          </a:p>
+        </p:txBody>
+      </p:sp>
+      <p:sp>
+        <p:nvSpPr>
+          <p:cNvPr id="10" name="TextBox 9"/>
+          <p:cNvSpPr txBox="1"/>
+          <p:nvPr/>
+        </p:nvSpPr>
+        <p:spPr>
+          <a:xfrm>
+            <a:off x="1371600" y="3120389"/>
+            <a:ext cx="9784080" cy="880109"/>
+          </a:xfrm>
+          <a:prstGeom prst="rect">
+            <a:avLst/>
+          </a:prstGeom>
+          <a:noFill/>
+        </p:spPr>
+        <p:txBody>
+          <a:bodyPr wrap="square" anchor="ctr" lIns="0" rIns="0" tIns="0" bIns="0">
+            <a:spAutoFit/>
+          </a:bodyPr>
+          <a:lstStyle/>
           <a:p>
             <a:pPr algn="l">
               <a:lnSpc>
-                <a:spcPct val="105000"/>
+                <a:spcPct val="102000"/>
               </a:lnSpc>
               <a:spcAft>
-                <a:spcPts val="1100"/>
+                <a:spcPts val="300"/>
               </a:spcAft>
             </a:pPr>
             <a:r>
-              <a:rPr sz="1600" b="1" i="0">
-                <a:solidFill>
-                  <a:srgbClr val="6A4C93"/>
+              <a:rPr sz="1700" b="1" i="0">
+                <a:solidFill>
+                  <a:srgbClr val="1D2433"/>
                 </a:solidFill>
                 <a:latin typeface="Calibri"/>
               </a:rPr>
-              <a:t>•  </a:t>
-            </a:r>
-            <a:r>
-              <a:rPr sz="1600" b="1" i="0">
-                <a:solidFill>
-                  <a:srgbClr val="1D2433"/>
-                </a:solidFill>
-                <a:latin typeface="Calibri"/>
-              </a:rPr>
-              <a:t>Growing problem  </a:t>
-            </a:r>
-            <a:r>
-              <a:rPr sz="1500" b="0" i="0">
-                <a:solidFill>
-                  <a:srgbClr val="6B7280"/>
-                </a:solidFill>
-                <a:latin typeface="Calibri"/>
-              </a:rPr>
-              <a:t>As more satellites are launched, the amount of debris grows, increasing the risk of collisions and threatening the future use of near-Earth space.</a:t>
+              <a:t>Why it is dangerous</a:t>
             </a:r>
           </a:p>
           <a:p>
             <a:pPr algn="l">
               <a:lnSpc>
-                <a:spcPct val="105000"/>
+                <a:spcPct val="102000"/>
               </a:lnSpc>
               <a:spcAft>
-                <a:spcPts val="1100"/>
+                <a:spcPts val="300"/>
               </a:spcAft>
             </a:pPr>
             <a:r>
-              <a:rPr sz="1600" b="1" i="0">
-                <a:solidFill>
-                  <a:srgbClr val="6A4C93"/>
+              <a:rPr sz="1350" b="0" i="0">
+                <a:solidFill>
+                  <a:srgbClr val="6B7280"/>
                 </a:solidFill>
                 <a:latin typeface="Calibri"/>
               </a:rPr>
-              <a:t>•  </a:t>
-            </a:r>
-            <a:r>
-              <a:rPr sz="1600" b="1" i="0">
+              <a:t>Debris travels at very high speed, so even a small piece can seriously damage or destroy a working satellite or spacecraft it strikes.</a:t>
+            </a:r>
+          </a:p>
+        </p:txBody>
+      </p:sp>
+      <p:sp>
+        <p:nvSpPr>
+          <p:cNvPr id="11" name="Rounded Rectangle 10"/>
+          <p:cNvSpPr/>
+          <p:nvPr/>
+        </p:nvSpPr>
+        <p:spPr>
+          <a:xfrm>
+            <a:off x="1051560" y="4141317"/>
+            <a:ext cx="100584" cy="545668"/>
+          </a:xfrm>
+          <a:prstGeom prst="roundRect">
+            <a:avLst>
+              <a:gd name="adj" fmla="val 50000"/>
+            </a:avLst>
+          </a:prstGeom>
+          <a:solidFill>
+            <a:srgbClr val="6A4C93"/>
+          </a:solidFill>
+          <a:ln>
+            <a:noFill/>
+          </a:ln>
+          <a:effectLst/>
+        </p:spPr>
+        <p:style>
+          <a:lnRef idx="1">
+            <a:schemeClr val="accent1"/>
+          </a:lnRef>
+          <a:fillRef idx="3">
+            <a:schemeClr val="accent1"/>
+          </a:fillRef>
+          <a:effectRef idx="2">
+            <a:schemeClr val="accent1"/>
+          </a:effectRef>
+          <a:fontRef idx="minor">
+            <a:schemeClr val="lt1"/>
+          </a:fontRef>
+        </p:style>
+        <p:txBody>
+          <a:bodyPr rtlCol="0" anchor="ctr"/>
+          <a:lstStyle/>
+          <a:p>
+            <a:pPr algn="ctr"/>
+          </a:p>
+        </p:txBody>
+      </p:sp>
+      <p:sp>
+        <p:nvSpPr>
+          <p:cNvPr id="12" name="TextBox 11"/>
+          <p:cNvSpPr txBox="1"/>
+          <p:nvPr/>
+        </p:nvSpPr>
+        <p:spPr>
+          <a:xfrm>
+            <a:off x="1371600" y="4000500"/>
+            <a:ext cx="9784080" cy="880109"/>
+          </a:xfrm>
+          <a:prstGeom prst="rect">
+            <a:avLst/>
+          </a:prstGeom>
+          <a:noFill/>
+        </p:spPr>
+        <p:txBody>
+          <a:bodyPr wrap="square" anchor="ctr" lIns="0" rIns="0" tIns="0" bIns="0">
+            <a:spAutoFit/>
+          </a:bodyPr>
+          <a:lstStyle/>
+          <a:p>
+            <a:pPr algn="l">
+              <a:lnSpc>
+                <a:spcPct val="102000"/>
+              </a:lnSpc>
+              <a:spcAft>
+                <a:spcPts val="300"/>
+              </a:spcAft>
+            </a:pPr>
+            <a:r>
+              <a:rPr sz="1700" b="1" i="0">
                 <a:solidFill>
                   <a:srgbClr val="1D2433"/>
                 </a:solidFill>
                 <a:latin typeface="Calibri"/>
               </a:rPr>
-              <a:t>Management  </a:t>
-            </a:r>
-            <a:r>
-              <a:rPr sz="1500" b="0" i="0">
+              <a:t>Growing problem</a:t>
+            </a:r>
+          </a:p>
+          <a:p>
+            <a:pPr algn="l">
+              <a:lnSpc>
+                <a:spcPct val="102000"/>
+              </a:lnSpc>
+              <a:spcAft>
+                <a:spcPts val="300"/>
+              </a:spcAft>
+            </a:pPr>
+            <a:r>
+              <a:rPr sz="1350" b="0" i="0">
+                <a:solidFill>
+                  <a:srgbClr val="6B7280"/>
+                </a:solidFill>
+                <a:latin typeface="Calibri"/>
+              </a:rPr>
+              <a:t>As more satellites are launched, the amount of debris grows, increasing the risk of collisions and threatening the future use of near-Earth space.</a:t>
+            </a:r>
+          </a:p>
+        </p:txBody>
+      </p:sp>
+      <p:sp>
+        <p:nvSpPr>
+          <p:cNvPr id="13" name="Rounded Rectangle 12"/>
+          <p:cNvSpPr/>
+          <p:nvPr/>
+        </p:nvSpPr>
+        <p:spPr>
+          <a:xfrm>
+            <a:off x="1051560" y="5021427"/>
+            <a:ext cx="100584" cy="545668"/>
+          </a:xfrm>
+          <a:prstGeom prst="roundRect">
+            <a:avLst>
+              <a:gd name="adj" fmla="val 50000"/>
+            </a:avLst>
+          </a:prstGeom>
+          <a:solidFill>
+            <a:srgbClr val="E63946"/>
+          </a:solidFill>
+          <a:ln>
+            <a:noFill/>
+          </a:ln>
+          <a:effectLst/>
+        </p:spPr>
+        <p:style>
+          <a:lnRef idx="1">
+            <a:schemeClr val="accent1"/>
+          </a:lnRef>
+          <a:fillRef idx="3">
+            <a:schemeClr val="accent1"/>
+          </a:fillRef>
+          <a:effectRef idx="2">
+            <a:schemeClr val="accent1"/>
+          </a:effectRef>
+          <a:fontRef idx="minor">
+            <a:schemeClr val="lt1"/>
+          </a:fontRef>
+        </p:style>
+        <p:txBody>
+          <a:bodyPr rtlCol="0" anchor="ctr"/>
+          <a:lstStyle/>
+          <a:p>
+            <a:pPr algn="ctr"/>
+          </a:p>
+        </p:txBody>
+      </p:sp>
+      <p:sp>
+        <p:nvSpPr>
+          <p:cNvPr id="14" name="TextBox 13"/>
+          <p:cNvSpPr txBox="1"/>
+          <p:nvPr/>
+        </p:nvSpPr>
+        <p:spPr>
+          <a:xfrm>
+            <a:off x="1371600" y="4880609"/>
+            <a:ext cx="9784080" cy="880109"/>
+          </a:xfrm>
+          <a:prstGeom prst="rect">
+            <a:avLst/>
+          </a:prstGeom>
+          <a:noFill/>
+        </p:spPr>
+        <p:txBody>
+          <a:bodyPr wrap="square" anchor="ctr" lIns="0" rIns="0" tIns="0" bIns="0">
+            <a:spAutoFit/>
+          </a:bodyPr>
+          <a:lstStyle/>
+          <a:p>
+            <a:pPr algn="l">
+              <a:lnSpc>
+                <a:spcPct val="102000"/>
+              </a:lnSpc>
+              <a:spcAft>
+                <a:spcPts val="300"/>
+              </a:spcAft>
+            </a:pPr>
+            <a:r>
+              <a:rPr sz="1700" b="1" i="0">
+                <a:solidFill>
+                  <a:srgbClr val="1D2433"/>
+                </a:solidFill>
+                <a:latin typeface="Calibri"/>
+              </a:rPr>
+              <a:t>Management</a:t>
+            </a:r>
+          </a:p>
+          <a:p>
+            <a:pPr algn="l">
+              <a:lnSpc>
+                <a:spcPct val="102000"/>
+              </a:lnSpc>
+              <a:spcAft>
+                <a:spcPts val="300"/>
+              </a:spcAft>
+            </a:pPr>
+            <a:r>
+              <a:rPr sz="1350" b="0" i="0">
                 <a:solidFill>
                   <a:srgbClr val="6B7280"/>
                 </a:solidFill>
@@ -22323,7 +22580,7 @@
         </p:nvSpPr>
         <p:spPr>
           <a:xfrm>
-            <a:off x="640080" y="1828800"/>
+            <a:off x="640080" y="1874519"/>
             <a:ext cx="10881360" cy="4114800"/>
           </a:xfrm>
           <a:prstGeom prst="roundRect">
@@ -22369,165 +22626,422 @@
       </p:sp>
       <p:sp>
         <p:nvSpPr>
-          <p:cNvPr id="7" name="TextBox 6"/>
+          <p:cNvPr id="7" name="Rounded Rectangle 6"/>
+          <p:cNvSpPr/>
+          <p:nvPr/>
+        </p:nvSpPr>
+        <p:spPr>
+          <a:xfrm>
+            <a:off x="1051560" y="2381097"/>
+            <a:ext cx="100584" cy="545668"/>
+          </a:xfrm>
+          <a:prstGeom prst="roundRect">
+            <a:avLst>
+              <a:gd name="adj" fmla="val 50000"/>
+            </a:avLst>
+          </a:prstGeom>
+          <a:solidFill>
+            <a:srgbClr val="0A9396"/>
+          </a:solidFill>
+          <a:ln>
+            <a:noFill/>
+          </a:ln>
+          <a:effectLst/>
+        </p:spPr>
+        <p:style>
+          <a:lnRef idx="1">
+            <a:schemeClr val="accent1"/>
+          </a:lnRef>
+          <a:fillRef idx="3">
+            <a:schemeClr val="accent1"/>
+          </a:fillRef>
+          <a:effectRef idx="2">
+            <a:schemeClr val="accent1"/>
+          </a:effectRef>
+          <a:fontRef idx="minor">
+            <a:schemeClr val="lt1"/>
+          </a:fontRef>
+        </p:style>
+        <p:txBody>
+          <a:bodyPr rtlCol="0" anchor="ctr"/>
+          <a:lstStyle/>
+          <a:p>
+            <a:pPr algn="ctr"/>
+          </a:p>
+        </p:txBody>
+      </p:sp>
+      <p:sp>
+        <p:nvSpPr>
+          <p:cNvPr id="8" name="TextBox 7"/>
           <p:cNvSpPr txBox="1"/>
           <p:nvPr/>
         </p:nvSpPr>
         <p:spPr>
           <a:xfrm>
-            <a:off x="1005840" y="2103120"/>
-            <a:ext cx="10058400" cy="3657600"/>
-          </a:xfrm>
-          <a:prstGeom prst="rect">
-            <a:avLst/>
-          </a:prstGeom>
-          <a:noFill/>
-        </p:spPr>
-        <p:txBody>
-          <a:bodyPr wrap="square" anchor="t" lIns="0" rIns="0" tIns="0" bIns="0">
+            <a:off x="1371600" y="2240279"/>
+            <a:ext cx="9784080" cy="880109"/>
+          </a:xfrm>
+          <a:prstGeom prst="rect">
+            <a:avLst/>
+          </a:prstGeom>
+          <a:noFill/>
+        </p:spPr>
+        <p:txBody>
+          <a:bodyPr wrap="square" anchor="ctr" lIns="0" rIns="0" tIns="0" bIns="0">
             <a:spAutoFit/>
           </a:bodyPr>
           <a:lstStyle/>
           <a:p>
             <a:pPr algn="l">
               <a:lnSpc>
-                <a:spcPct val="105000"/>
+                <a:spcPct val="102000"/>
               </a:lnSpc>
               <a:spcAft>
-                <a:spcPts val="1100"/>
+                <a:spcPts val="300"/>
               </a:spcAft>
             </a:pPr>
             <a:r>
-              <a:rPr sz="1600" b="1" i="0">
-                <a:solidFill>
-                  <a:srgbClr val="6A4C93"/>
+              <a:rPr sz="1700" b="1" i="0">
+                <a:solidFill>
+                  <a:srgbClr val="1D2433"/>
                 </a:solidFill>
                 <a:latin typeface="Calibri"/>
               </a:rPr>
-              <a:t>•  </a:t>
-            </a:r>
-            <a:r>
-              <a:rPr sz="1600" b="1" i="0">
-                <a:solidFill>
-                  <a:srgbClr val="1D2433"/>
-                </a:solidFill>
-                <a:latin typeface="Calibri"/>
-              </a:rPr>
-              <a:t>Space mission  </a:t>
-            </a:r>
-            <a:r>
-              <a:rPr sz="1500" b="0" i="0">
-                <a:solidFill>
-                  <a:srgbClr val="6B7280"/>
-                </a:solidFill>
-                <a:latin typeface="Calibri"/>
-              </a:rPr>
-              <a:t>A planned journey or project to send a spacecraft, satellite or probe into space to study the Earth, other bodies or space itself.</a:t>
+              <a:t>Space mission</a:t>
             </a:r>
           </a:p>
           <a:p>
             <a:pPr algn="l">
               <a:lnSpc>
-                <a:spcPct val="105000"/>
+                <a:spcPct val="102000"/>
               </a:lnSpc>
               <a:spcAft>
-                <a:spcPts val="1100"/>
+                <a:spcPts val="300"/>
               </a:spcAft>
             </a:pPr>
             <a:r>
-              <a:rPr sz="1600" b="1" i="0">
-                <a:solidFill>
-                  <a:srgbClr val="6A4C93"/>
+              <a:rPr sz="1350" b="0" i="0">
+                <a:solidFill>
+                  <a:srgbClr val="6B7280"/>
                 </a:solidFill>
                 <a:latin typeface="Calibri"/>
               </a:rPr>
-              <a:t>•  </a:t>
-            </a:r>
-            <a:r>
-              <a:rPr sz="1600" b="1" i="0">
-                <a:solidFill>
-                  <a:srgbClr val="1D2433"/>
-                </a:solidFill>
-                <a:latin typeface="Calibri"/>
-              </a:rPr>
-              <a:t>Artificial satellite  </a:t>
-            </a:r>
-            <a:r>
-              <a:rPr sz="1500" b="0" i="0">
-                <a:solidFill>
-                  <a:srgbClr val="6B7280"/>
-                </a:solidFill>
-                <a:latin typeface="Calibri"/>
-              </a:rPr>
-              <a:t>A man-made object deliberately placed into orbit around the Earth (or another body) to perform a specific task.</a:t>
-            </a:r>
-          </a:p>
+              <a:t>A planned journey or project to send a spacecraft, satellite or probe into space to study the Earth, other bodies or space itself.</a:t>
+            </a:r>
+          </a:p>
+        </p:txBody>
+      </p:sp>
+      <p:sp>
+        <p:nvSpPr>
+          <p:cNvPr id="9" name="Rounded Rectangle 8"/>
+          <p:cNvSpPr/>
+          <p:nvPr/>
+        </p:nvSpPr>
+        <p:spPr>
+          <a:xfrm>
+            <a:off x="1051560" y="3261207"/>
+            <a:ext cx="100584" cy="545668"/>
+          </a:xfrm>
+          <a:prstGeom prst="roundRect">
+            <a:avLst>
+              <a:gd name="adj" fmla="val 50000"/>
+            </a:avLst>
+          </a:prstGeom>
+          <a:solidFill>
+            <a:srgbClr val="F4801A"/>
+          </a:solidFill>
+          <a:ln>
+            <a:noFill/>
+          </a:ln>
+          <a:effectLst/>
+        </p:spPr>
+        <p:style>
+          <a:lnRef idx="1">
+            <a:schemeClr val="accent1"/>
+          </a:lnRef>
+          <a:fillRef idx="3">
+            <a:schemeClr val="accent1"/>
+          </a:fillRef>
+          <a:effectRef idx="2">
+            <a:schemeClr val="accent1"/>
+          </a:effectRef>
+          <a:fontRef idx="minor">
+            <a:schemeClr val="lt1"/>
+          </a:fontRef>
+        </p:style>
+        <p:txBody>
+          <a:bodyPr rtlCol="0" anchor="ctr"/>
+          <a:lstStyle/>
+          <a:p>
+            <a:pPr algn="ctr"/>
+          </a:p>
+        </p:txBody>
+      </p:sp>
+      <p:sp>
+        <p:nvSpPr>
+          <p:cNvPr id="10" name="TextBox 9"/>
+          <p:cNvSpPr txBox="1"/>
+          <p:nvPr/>
+        </p:nvSpPr>
+        <p:spPr>
+          <a:xfrm>
+            <a:off x="1371600" y="3120389"/>
+            <a:ext cx="9784080" cy="880109"/>
+          </a:xfrm>
+          <a:prstGeom prst="rect">
+            <a:avLst/>
+          </a:prstGeom>
+          <a:noFill/>
+        </p:spPr>
+        <p:txBody>
+          <a:bodyPr wrap="square" anchor="ctr" lIns="0" rIns="0" tIns="0" bIns="0">
+            <a:spAutoFit/>
+          </a:bodyPr>
+          <a:lstStyle/>
           <a:p>
             <a:pPr algn="l">
               <a:lnSpc>
-                <a:spcPct val="105000"/>
+                <a:spcPct val="102000"/>
               </a:lnSpc>
               <a:spcAft>
-                <a:spcPts val="1100"/>
+                <a:spcPts val="300"/>
               </a:spcAft>
             </a:pPr>
             <a:r>
-              <a:rPr sz="1600" b="1" i="0">
-                <a:solidFill>
-                  <a:srgbClr val="6A4C93"/>
+              <a:rPr sz="1700" b="1" i="0">
+                <a:solidFill>
+                  <a:srgbClr val="1D2433"/>
                 </a:solidFill>
                 <a:latin typeface="Calibri"/>
               </a:rPr>
-              <a:t>•  </a:t>
-            </a:r>
-            <a:r>
-              <a:rPr sz="1600" b="1" i="0">
-                <a:solidFill>
-                  <a:srgbClr val="1D2433"/>
-                </a:solidFill>
-                <a:latin typeface="Calibri"/>
-              </a:rPr>
-              <a:t>Why it stays in orbit  </a:t>
-            </a:r>
-            <a:r>
-              <a:rPr sz="1500" b="0" i="0">
-                <a:solidFill>
-                  <a:srgbClr val="6B7280"/>
-                </a:solidFill>
-                <a:latin typeface="Calibri"/>
-              </a:rPr>
-              <a:t>The satellite moves fast enough along its path that the Earth's gravity, acting as the centripetal force, keeps bending it into a closed orbit instead of pulling it straight down.</a:t>
+              <a:t>Artificial satellite</a:t>
             </a:r>
           </a:p>
           <a:p>
             <a:pPr algn="l">
               <a:lnSpc>
-                <a:spcPct val="105000"/>
+                <a:spcPct val="102000"/>
               </a:lnSpc>
               <a:spcAft>
-                <a:spcPts val="1100"/>
+                <a:spcPts val="300"/>
               </a:spcAft>
             </a:pPr>
             <a:r>
-              <a:rPr sz="1600" b="1" i="0">
-                <a:solidFill>
-                  <a:srgbClr val="6A4C93"/>
+              <a:rPr sz="1350" b="0" i="0">
+                <a:solidFill>
+                  <a:srgbClr val="6B7280"/>
                 </a:solidFill>
                 <a:latin typeface="Calibri"/>
               </a:rPr>
-              <a:t>•  </a:t>
-            </a:r>
-            <a:r>
-              <a:rPr sz="1600" b="1" i="0">
+              <a:t>A man-made object deliberately placed into orbit around the Earth (or another body) to perform a specific task.</a:t>
+            </a:r>
+          </a:p>
+        </p:txBody>
+      </p:sp>
+      <p:sp>
+        <p:nvSpPr>
+          <p:cNvPr id="11" name="Rounded Rectangle 10"/>
+          <p:cNvSpPr/>
+          <p:nvPr/>
+        </p:nvSpPr>
+        <p:spPr>
+          <a:xfrm>
+            <a:off x="1051560" y="4141317"/>
+            <a:ext cx="100584" cy="545668"/>
+          </a:xfrm>
+          <a:prstGeom prst="roundRect">
+            <a:avLst>
+              <a:gd name="adj" fmla="val 50000"/>
+            </a:avLst>
+          </a:prstGeom>
+          <a:solidFill>
+            <a:srgbClr val="6A4C93"/>
+          </a:solidFill>
+          <a:ln>
+            <a:noFill/>
+          </a:ln>
+          <a:effectLst/>
+        </p:spPr>
+        <p:style>
+          <a:lnRef idx="1">
+            <a:schemeClr val="accent1"/>
+          </a:lnRef>
+          <a:fillRef idx="3">
+            <a:schemeClr val="accent1"/>
+          </a:fillRef>
+          <a:effectRef idx="2">
+            <a:schemeClr val="accent1"/>
+          </a:effectRef>
+          <a:fontRef idx="minor">
+            <a:schemeClr val="lt1"/>
+          </a:fontRef>
+        </p:style>
+        <p:txBody>
+          <a:bodyPr rtlCol="0" anchor="ctr"/>
+          <a:lstStyle/>
+          <a:p>
+            <a:pPr algn="ctr"/>
+          </a:p>
+        </p:txBody>
+      </p:sp>
+      <p:sp>
+        <p:nvSpPr>
+          <p:cNvPr id="12" name="TextBox 11"/>
+          <p:cNvSpPr txBox="1"/>
+          <p:nvPr/>
+        </p:nvSpPr>
+        <p:spPr>
+          <a:xfrm>
+            <a:off x="1371600" y="4000500"/>
+            <a:ext cx="9784080" cy="880109"/>
+          </a:xfrm>
+          <a:prstGeom prst="rect">
+            <a:avLst/>
+          </a:prstGeom>
+          <a:noFill/>
+        </p:spPr>
+        <p:txBody>
+          <a:bodyPr wrap="square" anchor="ctr" lIns="0" rIns="0" tIns="0" bIns="0">
+            <a:spAutoFit/>
+          </a:bodyPr>
+          <a:lstStyle/>
+          <a:p>
+            <a:pPr algn="l">
+              <a:lnSpc>
+                <a:spcPct val="102000"/>
+              </a:lnSpc>
+              <a:spcAft>
+                <a:spcPts val="300"/>
+              </a:spcAft>
+            </a:pPr>
+            <a:r>
+              <a:rPr sz="1700" b="1" i="0">
                 <a:solidFill>
                   <a:srgbClr val="1D2433"/>
                 </a:solidFill>
                 <a:latin typeface="Calibri"/>
               </a:rPr>
-              <a:t>Uses of satellites  </a:t>
-            </a:r>
-            <a:r>
-              <a:rPr sz="1500" b="0" i="0">
+              <a:t>Why it stays in orbit</a:t>
+            </a:r>
+          </a:p>
+          <a:p>
+            <a:pPr algn="l">
+              <a:lnSpc>
+                <a:spcPct val="102000"/>
+              </a:lnSpc>
+              <a:spcAft>
+                <a:spcPts val="300"/>
+              </a:spcAft>
+            </a:pPr>
+            <a:r>
+              <a:rPr sz="1350" b="0" i="0">
+                <a:solidFill>
+                  <a:srgbClr val="6B7280"/>
+                </a:solidFill>
+                <a:latin typeface="Calibri"/>
+              </a:rPr>
+              <a:t>The satellite moves fast enough along its path that the Earth's gravity, acting as the centripetal force, keeps bending it into a closed orbit instead of pulling it straight down.</a:t>
+            </a:r>
+          </a:p>
+        </p:txBody>
+      </p:sp>
+      <p:sp>
+        <p:nvSpPr>
+          <p:cNvPr id="13" name="Rounded Rectangle 12"/>
+          <p:cNvSpPr/>
+          <p:nvPr/>
+        </p:nvSpPr>
+        <p:spPr>
+          <a:xfrm>
+            <a:off x="1051560" y="5021427"/>
+            <a:ext cx="100584" cy="545668"/>
+          </a:xfrm>
+          <a:prstGeom prst="roundRect">
+            <a:avLst>
+              <a:gd name="adj" fmla="val 50000"/>
+            </a:avLst>
+          </a:prstGeom>
+          <a:solidFill>
+            <a:srgbClr val="E63946"/>
+          </a:solidFill>
+          <a:ln>
+            <a:noFill/>
+          </a:ln>
+          <a:effectLst/>
+        </p:spPr>
+        <p:style>
+          <a:lnRef idx="1">
+            <a:schemeClr val="accent1"/>
+          </a:lnRef>
+          <a:fillRef idx="3">
+            <a:schemeClr val="accent1"/>
+          </a:fillRef>
+          <a:effectRef idx="2">
+            <a:schemeClr val="accent1"/>
+          </a:effectRef>
+          <a:fontRef idx="minor">
+            <a:schemeClr val="lt1"/>
+          </a:fontRef>
+        </p:style>
+        <p:txBody>
+          <a:bodyPr rtlCol="0" anchor="ctr"/>
+          <a:lstStyle/>
+          <a:p>
+            <a:pPr algn="ctr"/>
+          </a:p>
+        </p:txBody>
+      </p:sp>
+      <p:sp>
+        <p:nvSpPr>
+          <p:cNvPr id="14" name="TextBox 13"/>
+          <p:cNvSpPr txBox="1"/>
+          <p:nvPr/>
+        </p:nvSpPr>
+        <p:spPr>
+          <a:xfrm>
+            <a:off x="1371600" y="4880609"/>
+            <a:ext cx="9784080" cy="880109"/>
+          </a:xfrm>
+          <a:prstGeom prst="rect">
+            <a:avLst/>
+          </a:prstGeom>
+          <a:noFill/>
+        </p:spPr>
+        <p:txBody>
+          <a:bodyPr wrap="square" anchor="ctr" lIns="0" rIns="0" tIns="0" bIns="0">
+            <a:spAutoFit/>
+          </a:bodyPr>
+          <a:lstStyle/>
+          <a:p>
+            <a:pPr algn="l">
+              <a:lnSpc>
+                <a:spcPct val="102000"/>
+              </a:lnSpc>
+              <a:spcAft>
+                <a:spcPts val="300"/>
+              </a:spcAft>
+            </a:pPr>
+            <a:r>
+              <a:rPr sz="1700" b="1" i="0">
+                <a:solidFill>
+                  <a:srgbClr val="1D2433"/>
+                </a:solidFill>
+                <a:latin typeface="Calibri"/>
+              </a:rPr>
+              <a:t>Uses of satellites</a:t>
+            </a:r>
+          </a:p>
+          <a:p>
+            <a:pPr algn="l">
+              <a:lnSpc>
+                <a:spcPct val="102000"/>
+              </a:lnSpc>
+              <a:spcAft>
+                <a:spcPts val="300"/>
+              </a:spcAft>
+            </a:pPr>
+            <a:r>
+              <a:rPr sz="1350" b="0" i="0">
                 <a:solidFill>
                   <a:srgbClr val="6B7280"/>
                 </a:solidFill>
